--- a/site/clases/parte-3-estadistica-inferencial/193-pymc-v5-numpyro-arviz-stack-bayesiano/clase-193-pymc-v5-numpyro-arviz-stack-bayesiano-presentacion.pptx
+++ b/site/clases/parte-3-estadistica-inferencial/193-pymc-v5-numpyro-arviz-stack-bayesiano/clase-193-pymc-v5-numpyro-arviz-stack-bayesiano-presentacion.pptx
@@ -3272,7 +3272,7 @@
                 </a:solidFill>
                 <a:latin typeface="Segoe UI"/>
               </a:rPr>
-              <a:t>Parte: 3 — Estadística Inferencial y Causal · Fuente: PyMC v5 docs + NumPyro docs + ArviZ docs.  Duración estimada: 90 min.</a:t>
+              <a:t>Parte: 3 — Estadística Inferencial y Causal · Fuente: PyMC v5 docs + NumPyro docs + ArviZ docs.  Duración estimada: 90 min. · Nivel: Avanzado</a:t>
             </a:r>
           </a:p>
         </p:txBody>
@@ -3581,7 +3581,7 @@
                 </a:solidFill>
                 <a:latin typeface="Segoe UI"/>
               </a:rPr>
-              <a:t>Parte: 3 — Estadística Inferencial y Causal · Fuente: PyMC v5 docs + NumPyro docs + ArviZ docs.  Duración estimada: 90 min.</a:t>
+              <a:t>Parte: 3 — Estadística Inferencial y Causal · Fuente: PyMC v5 docs + NumPyro docs + ArviZ docs.  Duración estimada: 90 min. · Nivel: Avanzado</a:t>
             </a:r>
           </a:p>
         </p:txBody>
